--- a/class1/class1_simple.pptx
+++ b/class1/class1_simple.pptx
@@ -13355,7 +13355,7 @@
               </a:defRPr>
             </a:pPr>
             <a:r>
-              <a:t>今天理解流向；多头、归一化和训练实现留到下一节。</a:t>
+              <a:t>今天理解流向；多头、归一化和训练实现留到后续课程。</a:t>
             </a:r>
           </a:p>
         </p:txBody>
